--- a/docs/poster/variants/v13.pptx
+++ b/docs/poster/variants/v13.pptx
@@ -3569,6 +3569,90 @@
               </a:spcAft>
             </a:pPr>
             <a:r>
+              <a:rPr sz="6200" b="1">
+                <a:solidFill>
+                  <a:srgbClr val="1C6FB5"/>
+                </a:solidFill>
+                <a:latin typeface="Arial"/>
+              </a:rPr>
+              <a:t>1,389</a:t>
+            </a:r>
+          </a:p>
+        </p:txBody>
+      </p:sp>
+      <p:sp>
+        <p:nvSpPr>
+          <p:cNvPr id="14" name="TextBox 13"/>
+          <p:cNvSpPr txBox="1"/>
+          <p:nvPr/>
+        </p:nvSpPr>
+        <p:spPr>
+          <a:xfrm>
+            <a:off x="731520" y="13618463"/>
+            <a:ext cx="20482560" cy="365760"/>
+          </a:xfrm>
+          <a:prstGeom prst="rect">
+            <a:avLst/>
+          </a:prstGeom>
+          <a:noFill/>
+        </p:spPr>
+        <p:txBody>
+          <a:bodyPr wrap="square" lIns="0" rIns="0" tIns="0" bIns="0">
+            <a:spAutoFit/>
+          </a:bodyPr>
+          <a:lstStyle/>
+          <a:p>
+            <a:pPr algn="l">
+              <a:lnSpc>
+                <a:spcPct val="122000"/>
+              </a:lnSpc>
+              <a:spcAft>
+                <a:spcPts val="600"/>
+              </a:spcAft>
+            </a:pPr>
+            <a:r>
+              <a:rPr sz="1600" b="0">
+                <a:solidFill>
+                  <a:srgbClr val="556575"/>
+                </a:solidFill>
+                <a:latin typeface="Arial"/>
+              </a:rPr>
+              <a:t>joystick commands through the platform</a:t>
+            </a:r>
+          </a:p>
+        </p:txBody>
+      </p:sp>
+      <p:sp>
+        <p:nvSpPr>
+          <p:cNvPr id="15" name="TextBox 14"/>
+          <p:cNvSpPr txBox="1"/>
+          <p:nvPr/>
+        </p:nvSpPr>
+        <p:spPr>
+          <a:xfrm>
+            <a:off x="731520" y="14088871"/>
+            <a:ext cx="20482560" cy="365760"/>
+          </a:xfrm>
+          <a:prstGeom prst="rect">
+            <a:avLst/>
+          </a:prstGeom>
+          <a:noFill/>
+        </p:spPr>
+        <p:txBody>
+          <a:bodyPr wrap="square" lIns="0" rIns="0" tIns="0" bIns="0">
+            <a:spAutoFit/>
+          </a:bodyPr>
+          <a:lstStyle/>
+          <a:p>
+            <a:pPr algn="l">
+              <a:lnSpc>
+                <a:spcPct val="95000"/>
+              </a:lnSpc>
+              <a:spcAft>
+                <a:spcPts val="0"/>
+              </a:spcAft>
+            </a:pPr>
+            <a:r>
               <a:rPr sz="3400" b="1">
                 <a:solidFill>
                   <a:srgbClr val="14314E"/>
@@ -3582,13 +3666,13 @@
       </p:sp>
       <p:sp>
         <p:nvSpPr>
-          <p:cNvPr id="14" name="Rectangle 13"/>
+          <p:cNvPr id="16" name="Rectangle 15"/>
           <p:cNvSpPr/>
           <p:nvPr/>
         </p:nvSpPr>
         <p:spPr>
           <a:xfrm>
-            <a:off x="731520" y="13376655"/>
+            <a:off x="731520" y="14650211"/>
             <a:ext cx="20482560" cy="27432"/>
           </a:xfrm>
           <a:prstGeom prst="rect">
@@ -3626,13 +3710,13 @@
       </p:sp>
       <p:sp>
         <p:nvSpPr>
-          <p:cNvPr id="15" name="TextBox 14"/>
+          <p:cNvPr id="17" name="TextBox 16"/>
           <p:cNvSpPr txBox="1"/>
           <p:nvPr/>
         </p:nvSpPr>
         <p:spPr>
           <a:xfrm>
-            <a:off x="731520" y="13705839"/>
+            <a:off x="731520" y="14979395"/>
             <a:ext cx="20482560" cy="365760"/>
           </a:xfrm>
           <a:prstGeom prst="rect">
@@ -3668,13 +3752,13 @@
       </p:sp>
       <p:sp>
         <p:nvSpPr>
-          <p:cNvPr id="16" name="TextBox 15"/>
+          <p:cNvPr id="18" name="TextBox 17"/>
           <p:cNvSpPr txBox="1"/>
           <p:nvPr/>
         </p:nvSpPr>
         <p:spPr>
           <a:xfrm>
-            <a:off x="731520" y="15197327"/>
+            <a:off x="731520" y="16470884"/>
             <a:ext cx="20482560" cy="365760"/>
           </a:xfrm>
           <a:prstGeom prst="rect">
@@ -3710,13 +3794,13 @@
       </p:sp>
       <p:sp>
         <p:nvSpPr>
-          <p:cNvPr id="17" name="Rectangle 16"/>
+          <p:cNvPr id="19" name="Rectangle 18"/>
           <p:cNvSpPr/>
           <p:nvPr/>
         </p:nvSpPr>
         <p:spPr>
           <a:xfrm>
-            <a:off x="731520" y="15758667"/>
+            <a:off x="731520" y="17032224"/>
             <a:ext cx="20482560" cy="27432"/>
           </a:xfrm>
           <a:prstGeom prst="rect">
@@ -3754,7 +3838,7 @@
       </p:sp>
       <p:pic>
         <p:nvPicPr>
-          <p:cNvPr id="18" name="Picture 17" descr="f_rounds.png"/>
+          <p:cNvPr id="20" name="Picture 19" descr="f_rounds.png"/>
           <p:cNvPicPr>
             <a:picLocks noChangeAspect="1"/>
           </p:cNvPicPr>
@@ -3768,7 +3852,7 @@
         </p:blipFill>
         <p:spPr>
           <a:xfrm>
-            <a:off x="731520" y="16087851"/>
+            <a:off x="731520" y="17361407"/>
             <a:ext cx="20482560" cy="4663440"/>
           </a:xfrm>
           <a:prstGeom prst="rect">
@@ -3778,13 +3862,13 @@
       </p:pic>
       <p:sp>
         <p:nvSpPr>
-          <p:cNvPr id="19" name="TextBox 18"/>
+          <p:cNvPr id="21" name="TextBox 20"/>
           <p:cNvSpPr txBox="1"/>
           <p:nvPr/>
         </p:nvSpPr>
         <p:spPr>
           <a:xfrm>
-            <a:off x="731520" y="20861019"/>
+            <a:off x="731520" y="22134576"/>
             <a:ext cx="20482560" cy="365760"/>
           </a:xfrm>
           <a:prstGeom prst="rect">
@@ -3820,13 +3904,13 @@
       </p:sp>
       <p:sp>
         <p:nvSpPr>
-          <p:cNvPr id="20" name="TextBox 19"/>
+          <p:cNvPr id="22" name="TextBox 21"/>
           <p:cNvSpPr txBox="1"/>
           <p:nvPr/>
         </p:nvSpPr>
         <p:spPr>
           <a:xfrm>
-            <a:off x="731520" y="21891243"/>
+            <a:off x="731520" y="23164800"/>
             <a:ext cx="20482560" cy="365760"/>
           </a:xfrm>
           <a:prstGeom prst="rect">
@@ -3862,7 +3946,7 @@
       </p:sp>
       <p:sp>
         <p:nvSpPr>
-          <p:cNvPr id="21" name="TextBox 20"/>
+          <p:cNvPr id="23" name="TextBox 22"/>
           <p:cNvSpPr txBox="1"/>
           <p:nvPr/>
         </p:nvSpPr>
@@ -3904,7 +3988,7 @@
       </p:sp>
       <p:sp>
         <p:nvSpPr>
-          <p:cNvPr id="22" name="Rectangle 21"/>
+          <p:cNvPr id="24" name="Rectangle 23"/>
           <p:cNvSpPr/>
           <p:nvPr/>
         </p:nvSpPr>
@@ -3948,7 +4032,7 @@
       </p:sp>
       <p:sp>
         <p:nvSpPr>
-          <p:cNvPr id="23" name="TextBox 22"/>
+          <p:cNvPr id="25" name="TextBox 24"/>
           <p:cNvSpPr txBox="1"/>
           <p:nvPr/>
         </p:nvSpPr>
@@ -3983,14 +4067,14 @@
                 </a:solidFill>
                 <a:latin typeface="Arial"/>
               </a:rPr>
-              <a:t>Robot 241 is a tracked rover that drives crop rows and streams camera, GPS and two IMUs. The laser cart carries the weeder: a galvanometer laser, a down camera over the work zone and a forward camera. A Unitree humanoid has a project and has uploaded nothing yet. Between them the two ground vehicles have recorded 2,686 frames in 26 drives.</a:t>
-            </a:r>
-          </a:p>
-        </p:txBody>
-      </p:sp>
-      <p:sp>
-        <p:nvSpPr>
-          <p:cNvPr id="24" name="TextBox 23"/>
+              <a:t>Robot 241 is a tracked rover that drives crop rows and streams camera, GPS and two IMUs. The laser cart carries the weeder: a galvanometer laser, a down camera over the work zone and a forward camera. Ten projects sit on the platform and two of them have a robot reporting into them. Between those two vehicles, 2,686 frames in 26 drives.</a:t>
+            </a:r>
+          </a:p>
+        </p:txBody>
+      </p:sp>
+      <p:sp>
+        <p:nvSpPr>
+          <p:cNvPr id="26" name="TextBox 25"/>
           <p:cNvSpPr txBox="1"/>
           <p:nvPr/>
         </p:nvSpPr>
@@ -4019,6 +4103,90 @@
               </a:spcAft>
             </a:pPr>
             <a:r>
+              <a:rPr sz="6200" b="1">
+                <a:solidFill>
+                  <a:srgbClr val="1C6FB5"/>
+                </a:solidFill>
+                <a:latin typeface="Arial"/>
+              </a:rPr>
+              <a:t>14</a:t>
+            </a:r>
+          </a:p>
+        </p:txBody>
+      </p:sp>
+      <p:sp>
+        <p:nvSpPr>
+          <p:cNvPr id="27" name="TextBox 26"/>
+          <p:cNvSpPr txBox="1"/>
+          <p:nvPr/>
+        </p:nvSpPr>
+        <p:spPr>
+          <a:xfrm>
+            <a:off x="21579840" y="14238223"/>
+            <a:ext cx="10607040" cy="365760"/>
+          </a:xfrm>
+          <a:prstGeom prst="rect">
+            <a:avLst/>
+          </a:prstGeom>
+          <a:noFill/>
+        </p:spPr>
+        <p:txBody>
+          <a:bodyPr wrap="square" lIns="0" rIns="0" tIns="0" bIns="0">
+            <a:spAutoFit/>
+          </a:bodyPr>
+          <a:lstStyle/>
+          <a:p>
+            <a:pPr algn="l">
+              <a:lnSpc>
+                <a:spcPct val="122000"/>
+              </a:lnSpc>
+              <a:spcAft>
+                <a:spcPts val="600"/>
+              </a:spcAft>
+            </a:pPr>
+            <a:r>
+              <a:rPr sz="1600" b="0">
+                <a:solidFill>
+                  <a:srgbClr val="556575"/>
+                </a:solidFill>
+                <a:latin typeface="Arial"/>
+              </a:rPr>
+              <a:t>analysis tools the planner can choose from</a:t>
+            </a:r>
+          </a:p>
+        </p:txBody>
+      </p:sp>
+      <p:sp>
+        <p:nvSpPr>
+          <p:cNvPr id="28" name="TextBox 27"/>
+          <p:cNvSpPr txBox="1"/>
+          <p:nvPr/>
+        </p:nvSpPr>
+        <p:spPr>
+          <a:xfrm>
+            <a:off x="21579840" y="14708632"/>
+            <a:ext cx="10607040" cy="365760"/>
+          </a:xfrm>
+          <a:prstGeom prst="rect">
+            <a:avLst/>
+          </a:prstGeom>
+          <a:noFill/>
+        </p:spPr>
+        <p:txBody>
+          <a:bodyPr wrap="square" lIns="0" rIns="0" tIns="0" bIns="0">
+            <a:spAutoFit/>
+          </a:bodyPr>
+          <a:lstStyle/>
+          <a:p>
+            <a:pPr algn="l">
+              <a:lnSpc>
+                <a:spcPct val="95000"/>
+              </a:lnSpc>
+              <a:spcAft>
+                <a:spcPts val="0"/>
+              </a:spcAft>
+            </a:pPr>
+            <a:r>
               <a:rPr sz="3400" b="1">
                 <a:solidFill>
                   <a:srgbClr val="14314E"/>
@@ -4032,13 +4200,13 @@
       </p:sp>
       <p:sp>
         <p:nvSpPr>
-          <p:cNvPr id="25" name="Rectangle 24"/>
+          <p:cNvPr id="29" name="Rectangle 28"/>
           <p:cNvSpPr/>
           <p:nvPr/>
         </p:nvSpPr>
         <p:spPr>
           <a:xfrm>
-            <a:off x="21579840" y="13996415"/>
+            <a:off x="21579840" y="15269972"/>
             <a:ext cx="10607040" cy="27432"/>
           </a:xfrm>
           <a:prstGeom prst="rect">
@@ -4076,13 +4244,13 @@
       </p:sp>
       <p:sp>
         <p:nvSpPr>
-          <p:cNvPr id="26" name="TextBox 25"/>
+          <p:cNvPr id="30" name="TextBox 29"/>
           <p:cNvSpPr txBox="1"/>
           <p:nvPr/>
         </p:nvSpPr>
         <p:spPr>
           <a:xfrm>
-            <a:off x="21579840" y="14325599"/>
+            <a:off x="21579840" y="15599156"/>
             <a:ext cx="10607040" cy="365760"/>
           </a:xfrm>
           <a:prstGeom prst="rect">
@@ -4118,13 +4286,13 @@
       </p:sp>
       <p:sp>
         <p:nvSpPr>
-          <p:cNvPr id="27" name="TextBox 26"/>
+          <p:cNvPr id="31" name="TextBox 30"/>
           <p:cNvSpPr txBox="1"/>
           <p:nvPr/>
         </p:nvSpPr>
         <p:spPr>
           <a:xfrm>
-            <a:off x="21579840" y="16126968"/>
+            <a:off x="21579840" y="17400524"/>
             <a:ext cx="10607040" cy="365760"/>
           </a:xfrm>
           <a:prstGeom prst="rect">
@@ -4160,13 +4328,13 @@
       </p:sp>
       <p:sp>
         <p:nvSpPr>
-          <p:cNvPr id="28" name="Rectangle 27"/>
+          <p:cNvPr id="32" name="Rectangle 31"/>
           <p:cNvSpPr/>
           <p:nvPr/>
         </p:nvSpPr>
         <p:spPr>
           <a:xfrm>
-            <a:off x="21579840" y="16688308"/>
+            <a:off x="21579840" y="17961864"/>
             <a:ext cx="10607040" cy="27432"/>
           </a:xfrm>
           <a:prstGeom prst="rect">
@@ -4204,13 +4372,13 @@
       </p:sp>
       <p:sp>
         <p:nvSpPr>
-          <p:cNvPr id="29" name="TextBox 28"/>
+          <p:cNvPr id="33" name="TextBox 32"/>
           <p:cNvSpPr txBox="1"/>
           <p:nvPr/>
         </p:nvSpPr>
         <p:spPr>
           <a:xfrm>
-            <a:off x="21579840" y="17017492"/>
+            <a:off x="21579840" y="18291048"/>
             <a:ext cx="10607040" cy="365760"/>
           </a:xfrm>
           <a:prstGeom prst="rect">
@@ -4246,13 +4414,13 @@
       </p:sp>
       <p:sp>
         <p:nvSpPr>
-          <p:cNvPr id="30" name="TextBox 29"/>
+          <p:cNvPr id="34" name="TextBox 33"/>
           <p:cNvSpPr txBox="1"/>
           <p:nvPr/>
         </p:nvSpPr>
         <p:spPr>
           <a:xfrm>
-            <a:off x="21579840" y="18508980"/>
+            <a:off x="21579840" y="19782536"/>
             <a:ext cx="10607040" cy="365760"/>
           </a:xfrm>
           <a:prstGeom prst="rect">
@@ -4275,6 +4443,90 @@
               </a:spcAft>
             </a:pPr>
             <a:r>
+              <a:rPr sz="6200" b="1">
+                <a:solidFill>
+                  <a:srgbClr val="1C6FB5"/>
+                </a:solidFill>
+                <a:latin typeface="Arial"/>
+              </a:rPr>
+              <a:t>92</a:t>
+            </a:r>
+          </a:p>
+        </p:txBody>
+      </p:sp>
+      <p:sp>
+        <p:nvSpPr>
+          <p:cNvPr id="35" name="TextBox 34"/>
+          <p:cNvSpPr txBox="1"/>
+          <p:nvPr/>
+        </p:nvSpPr>
+        <p:spPr>
+          <a:xfrm>
+            <a:off x="21579840" y="20585684"/>
+            <a:ext cx="10607040" cy="365760"/>
+          </a:xfrm>
+          <a:prstGeom prst="rect">
+            <a:avLst/>
+          </a:prstGeom>
+          <a:noFill/>
+        </p:spPr>
+        <p:txBody>
+          <a:bodyPr wrap="square" lIns="0" rIns="0" tIns="0" bIns="0">
+            <a:spAutoFit/>
+          </a:bodyPr>
+          <a:lstStyle/>
+          <a:p>
+            <a:pPr algn="l">
+              <a:lnSpc>
+                <a:spcPct val="122000"/>
+              </a:lnSpc>
+              <a:spcAft>
+                <a:spcPts val="600"/>
+              </a:spcAft>
+            </a:pPr>
+            <a:r>
+              <a:rPr sz="1600" b="0">
+                <a:solidFill>
+                  <a:srgbClr val="556575"/>
+                </a:solidFill>
+                <a:latin typeface="Arial"/>
+              </a:rPr>
+              <a:t>questions asked of a dataset so far</a:t>
+            </a:r>
+          </a:p>
+        </p:txBody>
+      </p:sp>
+      <p:sp>
+        <p:nvSpPr>
+          <p:cNvPr id="36" name="TextBox 35"/>
+          <p:cNvSpPr txBox="1"/>
+          <p:nvPr/>
+        </p:nvSpPr>
+        <p:spPr>
+          <a:xfrm>
+            <a:off x="21579840" y="21056092"/>
+            <a:ext cx="10607040" cy="365760"/>
+          </a:xfrm>
+          <a:prstGeom prst="rect">
+            <a:avLst/>
+          </a:prstGeom>
+          <a:noFill/>
+        </p:spPr>
+        <p:txBody>
+          <a:bodyPr wrap="square" lIns="0" rIns="0" tIns="0" bIns="0">
+            <a:spAutoFit/>
+          </a:bodyPr>
+          <a:lstStyle/>
+          <a:p>
+            <a:pPr algn="l">
+              <a:lnSpc>
+                <a:spcPct val="95000"/>
+              </a:lnSpc>
+              <a:spcAft>
+                <a:spcPts val="0"/>
+              </a:spcAft>
+            </a:pPr>
+            <a:r>
               <a:rPr sz="3400" b="1">
                 <a:solidFill>
                   <a:srgbClr val="14314E"/>
@@ -4288,13 +4540,13 @@
       </p:sp>
       <p:sp>
         <p:nvSpPr>
-          <p:cNvPr id="31" name="Rectangle 30"/>
+          <p:cNvPr id="37" name="Rectangle 36"/>
           <p:cNvSpPr/>
           <p:nvPr/>
         </p:nvSpPr>
         <p:spPr>
           <a:xfrm>
-            <a:off x="21579840" y="19070320"/>
+            <a:off x="21579840" y="21617432"/>
             <a:ext cx="10607040" cy="27432"/>
           </a:xfrm>
           <a:prstGeom prst="rect">
@@ -4332,13 +4584,13 @@
       </p:sp>
       <p:sp>
         <p:nvSpPr>
-          <p:cNvPr id="32" name="TextBox 31"/>
+          <p:cNvPr id="38" name="TextBox 37"/>
           <p:cNvSpPr txBox="1"/>
           <p:nvPr/>
         </p:nvSpPr>
         <p:spPr>
           <a:xfrm>
-            <a:off x="21579840" y="19399504"/>
+            <a:off x="21579840" y="21946616"/>
             <a:ext cx="10607040" cy="365760"/>
           </a:xfrm>
           <a:prstGeom prst="rect">
@@ -4374,13 +4626,13 @@
       </p:sp>
       <p:sp>
         <p:nvSpPr>
-          <p:cNvPr id="33" name="TextBox 32"/>
+          <p:cNvPr id="39" name="TextBox 38"/>
           <p:cNvSpPr txBox="1"/>
           <p:nvPr/>
         </p:nvSpPr>
         <p:spPr>
           <a:xfrm>
-            <a:off x="21579840" y="21200872"/>
+            <a:off x="21579840" y="23747984"/>
             <a:ext cx="10607040" cy="365760"/>
           </a:xfrm>
           <a:prstGeom prst="rect">
@@ -4416,13 +4668,13 @@
       </p:sp>
       <p:sp>
         <p:nvSpPr>
-          <p:cNvPr id="34" name="Rectangle 33"/>
+          <p:cNvPr id="40" name="Rectangle 39"/>
           <p:cNvSpPr/>
           <p:nvPr/>
         </p:nvSpPr>
         <p:spPr>
           <a:xfrm>
-            <a:off x="21579840" y="21762212"/>
+            <a:off x="21579840" y="24309324"/>
             <a:ext cx="10607040" cy="27432"/>
           </a:xfrm>
           <a:prstGeom prst="rect">
@@ -4460,13 +4712,13 @@
       </p:sp>
       <p:sp>
         <p:nvSpPr>
-          <p:cNvPr id="35" name="TextBox 34"/>
+          <p:cNvPr id="41" name="TextBox 40"/>
           <p:cNvSpPr txBox="1"/>
           <p:nvPr/>
         </p:nvSpPr>
         <p:spPr>
           <a:xfrm>
-            <a:off x="21579840" y="22091396"/>
+            <a:off x="21579840" y="24638508"/>
             <a:ext cx="10607040" cy="365760"/>
           </a:xfrm>
           <a:prstGeom prst="rect">
@@ -4502,7 +4754,7 @@
       </p:sp>
       <p:sp>
         <p:nvSpPr>
-          <p:cNvPr id="36" name="TextBox 35"/>
+          <p:cNvPr id="42" name="TextBox 41"/>
           <p:cNvSpPr txBox="1"/>
           <p:nvPr/>
         </p:nvSpPr>
@@ -4544,7 +4796,7 @@
       </p:sp>
       <p:sp>
         <p:nvSpPr>
-          <p:cNvPr id="37" name="Rectangle 36"/>
+          <p:cNvPr id="43" name="Rectangle 42"/>
           <p:cNvSpPr/>
           <p:nvPr/>
         </p:nvSpPr>
@@ -4588,7 +4840,7 @@
       </p:sp>
       <p:sp>
         <p:nvSpPr>
-          <p:cNvPr id="38" name="TextBox 37"/>
+          <p:cNvPr id="44" name="TextBox 43"/>
           <p:cNvSpPr txBox="1"/>
           <p:nvPr/>
         </p:nvSpPr>
@@ -4630,7 +4882,7 @@
       </p:sp>
       <p:sp>
         <p:nvSpPr>
-          <p:cNvPr id="39" name="TextBox 38"/>
+          <p:cNvPr id="45" name="TextBox 44"/>
           <p:cNvSpPr txBox="1"/>
           <p:nvPr/>
         </p:nvSpPr>
@@ -4672,7 +4924,7 @@
       </p:sp>
       <p:sp>
         <p:nvSpPr>
-          <p:cNvPr id="40" name="Rectangle 39"/>
+          <p:cNvPr id="46" name="Rectangle 45"/>
           <p:cNvSpPr/>
           <p:nvPr/>
         </p:nvSpPr>
@@ -4716,7 +4968,7 @@
       </p:sp>
       <p:pic>
         <p:nvPicPr>
-          <p:cNvPr id="41" name="Picture 40" descr="l_robots.png"/>
+          <p:cNvPr id="47" name="Picture 46" descr="l_robots.png"/>
           <p:cNvPicPr>
             <a:picLocks noChangeAspect="1"/>
           </p:cNvPicPr>
@@ -4740,7 +4992,7 @@
       </p:pic>
       <p:sp>
         <p:nvSpPr>
-          <p:cNvPr id="42" name="TextBox 41"/>
+          <p:cNvPr id="48" name="TextBox 47"/>
           <p:cNvSpPr txBox="1"/>
           <p:nvPr/>
         </p:nvSpPr>
@@ -4782,7 +5034,7 @@
       </p:sp>
       <p:sp>
         <p:nvSpPr>
-          <p:cNvPr id="43" name="TextBox 42"/>
+          <p:cNvPr id="49" name="TextBox 48"/>
           <p:cNvSpPr txBox="1"/>
           <p:nvPr/>
         </p:nvSpPr>
@@ -4824,7 +5076,7 @@
       </p:sp>
       <p:sp>
         <p:nvSpPr>
-          <p:cNvPr id="44" name="TextBox 43"/>
+          <p:cNvPr id="50" name="TextBox 49"/>
           <p:cNvSpPr txBox="1"/>
           <p:nvPr/>
         </p:nvSpPr>
@@ -4866,7 +5118,7 @@
       </p:sp>
       <p:sp>
         <p:nvSpPr>
-          <p:cNvPr id="45" name="Rectangle 44"/>
+          <p:cNvPr id="51" name="Rectangle 50"/>
           <p:cNvSpPr/>
           <p:nvPr/>
         </p:nvSpPr>
@@ -4910,7 +5162,7 @@
       </p:sp>
       <p:sp>
         <p:nvSpPr>
-          <p:cNvPr id="46" name="TextBox 45"/>
+          <p:cNvPr id="52" name="TextBox 51"/>
           <p:cNvSpPr txBox="1"/>
           <p:nvPr/>
         </p:nvSpPr>
@@ -4952,7 +5204,7 @@
       </p:sp>
       <p:sp>
         <p:nvSpPr>
-          <p:cNvPr id="47" name="TextBox 46"/>
+          <p:cNvPr id="53" name="TextBox 52"/>
           <p:cNvSpPr txBox="1"/>
           <p:nvPr/>
         </p:nvSpPr>
@@ -4994,7 +5246,7 @@
       </p:sp>
       <p:sp>
         <p:nvSpPr>
-          <p:cNvPr id="48" name="Rectangle 47"/>
+          <p:cNvPr id="54" name="Rectangle 53"/>
           <p:cNvSpPr/>
           <p:nvPr/>
         </p:nvSpPr>
@@ -5038,7 +5290,7 @@
       </p:sp>
       <p:sp>
         <p:nvSpPr>
-          <p:cNvPr id="49" name="TextBox 48"/>
+          <p:cNvPr id="55" name="TextBox 54"/>
           <p:cNvSpPr txBox="1"/>
           <p:nvPr/>
         </p:nvSpPr>
@@ -5080,7 +5332,7 @@
       </p:sp>
       <p:sp>
         <p:nvSpPr>
-          <p:cNvPr id="50" name="TextBox 49"/>
+          <p:cNvPr id="56" name="TextBox 55"/>
           <p:cNvSpPr txBox="1"/>
           <p:nvPr/>
         </p:nvSpPr>
@@ -5122,7 +5374,7 @@
       </p:sp>
       <p:sp>
         <p:nvSpPr>
-          <p:cNvPr id="51" name="Rectangle 50"/>
+          <p:cNvPr id="57" name="Rectangle 56"/>
           <p:cNvSpPr/>
           <p:nvPr/>
         </p:nvSpPr>
@@ -5166,7 +5418,7 @@
       </p:sp>
       <p:sp>
         <p:nvSpPr>
-          <p:cNvPr id="52" name="TextBox 51"/>
+          <p:cNvPr id="58" name="TextBox 57"/>
           <p:cNvSpPr txBox="1"/>
           <p:nvPr/>
         </p:nvSpPr>
@@ -5208,7 +5460,7 @@
       </p:sp>
       <p:sp>
         <p:nvSpPr>
-          <p:cNvPr id="53" name="Rectangle 52"/>
+          <p:cNvPr id="59" name="Rectangle 58"/>
           <p:cNvSpPr/>
           <p:nvPr/>
         </p:nvSpPr>
@@ -5252,7 +5504,7 @@
       </p:sp>
       <p:sp>
         <p:nvSpPr>
-          <p:cNvPr id="54" name="TextBox 53"/>
+          <p:cNvPr id="60" name="TextBox 59"/>
           <p:cNvSpPr txBox="1"/>
           <p:nvPr/>
         </p:nvSpPr>
@@ -5294,7 +5546,7 @@
       </p:sp>
       <p:sp>
         <p:nvSpPr>
-          <p:cNvPr id="55" name="TextBox 54"/>
+          <p:cNvPr id="61" name="TextBox 60"/>
           <p:cNvSpPr txBox="1"/>
           <p:nvPr/>
         </p:nvSpPr>
@@ -5336,7 +5588,7 @@
       </p:sp>
       <p:sp>
         <p:nvSpPr>
-          <p:cNvPr id="56" name="TextBox 55"/>
+          <p:cNvPr id="62" name="TextBox 61"/>
           <p:cNvSpPr txBox="1"/>
           <p:nvPr/>
         </p:nvSpPr>
